--- a/Documentation/Project.pptx
+++ b/Documentation/Project.pptx
@@ -30,11 +30,11 @@
       <p:regular r:id="rId15"/>
     </p:embeddedFont>
     <p:embeddedFont>
-      <p:font typeface="Prompt" panose="00000500000000000000" pitchFamily="2" charset="-34"/>
+      <p:font typeface="Prompt" panose="020B0502040204020203" pitchFamily="2" charset="-34"/>
       <p:regular r:id="rId16"/>
     </p:embeddedFont>
     <p:embeddedFont>
-      <p:font typeface="Prompt Light" panose="00000400000000000000" pitchFamily="2" charset="-34"/>
+      <p:font typeface="Prompt Light" panose="020B0502040204020203" pitchFamily="2" charset="-34"/>
       <p:regular r:id="rId17"/>
     </p:embeddedFont>
   </p:embeddedFontLst>
@@ -332,7 +332,7 @@
             <a:fld id="{1D8BD707-D9CF-40AE-B4C6-C98DA3205C09}" type="datetimeFigureOut">
               <a:rPr lang="en-US" smtClean="0"/>
               <a:pPr/>
-              <a:t>1/31/2026</a:t>
+              <a:t>2/2/2026</a:t>
             </a:fld>
             <a:endParaRPr lang="en-US"/>
           </a:p>
@@ -497,7 +497,7 @@
             <a:fld id="{1D8BD707-D9CF-40AE-B4C6-C98DA3205C09}" type="datetimeFigureOut">
               <a:rPr lang="en-US" smtClean="0"/>
               <a:pPr/>
-              <a:t>1/31/2026</a:t>
+              <a:t>2/2/2026</a:t>
             </a:fld>
             <a:endParaRPr lang="en-US"/>
           </a:p>
@@ -672,7 +672,7 @@
             <a:fld id="{1D8BD707-D9CF-40AE-B4C6-C98DA3205C09}" type="datetimeFigureOut">
               <a:rPr lang="en-US" smtClean="0"/>
               <a:pPr/>
-              <a:t>1/31/2026</a:t>
+              <a:t>2/2/2026</a:t>
             </a:fld>
             <a:endParaRPr lang="en-US"/>
           </a:p>
@@ -837,7 +837,7 @@
             <a:fld id="{1D8BD707-D9CF-40AE-B4C6-C98DA3205C09}" type="datetimeFigureOut">
               <a:rPr lang="en-US" smtClean="0"/>
               <a:pPr/>
-              <a:t>1/31/2026</a:t>
+              <a:t>2/2/2026</a:t>
             </a:fld>
             <a:endParaRPr lang="en-US"/>
           </a:p>
@@ -1079,7 +1079,7 @@
             <a:fld id="{1D8BD707-D9CF-40AE-B4C6-C98DA3205C09}" type="datetimeFigureOut">
               <a:rPr lang="en-US" smtClean="0"/>
               <a:pPr/>
-              <a:t>1/31/2026</a:t>
+              <a:t>2/2/2026</a:t>
             </a:fld>
             <a:endParaRPr lang="en-US"/>
           </a:p>
@@ -1361,7 +1361,7 @@
             <a:fld id="{1D8BD707-D9CF-40AE-B4C6-C98DA3205C09}" type="datetimeFigureOut">
               <a:rPr lang="en-US" smtClean="0"/>
               <a:pPr/>
-              <a:t>1/31/2026</a:t>
+              <a:t>2/2/2026</a:t>
             </a:fld>
             <a:endParaRPr lang="en-US"/>
           </a:p>
@@ -1777,7 +1777,7 @@
             <a:fld id="{1D8BD707-D9CF-40AE-B4C6-C98DA3205C09}" type="datetimeFigureOut">
               <a:rPr lang="en-US" smtClean="0"/>
               <a:pPr/>
-              <a:t>1/31/2026</a:t>
+              <a:t>2/2/2026</a:t>
             </a:fld>
             <a:endParaRPr lang="en-US"/>
           </a:p>
@@ -1891,7 +1891,7 @@
             <a:fld id="{1D8BD707-D9CF-40AE-B4C6-C98DA3205C09}" type="datetimeFigureOut">
               <a:rPr lang="en-US" smtClean="0"/>
               <a:pPr/>
-              <a:t>1/31/2026</a:t>
+              <a:t>2/2/2026</a:t>
             </a:fld>
             <a:endParaRPr lang="en-US"/>
           </a:p>
@@ -1983,7 +1983,7 @@
             <a:fld id="{1D8BD707-D9CF-40AE-B4C6-C98DA3205C09}" type="datetimeFigureOut">
               <a:rPr lang="en-US" smtClean="0"/>
               <a:pPr/>
-              <a:t>1/31/2026</a:t>
+              <a:t>2/2/2026</a:t>
             </a:fld>
             <a:endParaRPr lang="en-US"/>
           </a:p>
@@ -2255,7 +2255,7 @@
             <a:fld id="{1D8BD707-D9CF-40AE-B4C6-C98DA3205C09}" type="datetimeFigureOut">
               <a:rPr lang="en-US" smtClean="0"/>
               <a:pPr/>
-              <a:t>1/31/2026</a:t>
+              <a:t>2/2/2026</a:t>
             </a:fld>
             <a:endParaRPr lang="en-US"/>
           </a:p>
@@ -2504,7 +2504,7 @@
             <a:fld id="{1D8BD707-D9CF-40AE-B4C6-C98DA3205C09}" type="datetimeFigureOut">
               <a:rPr lang="en-US" smtClean="0"/>
               <a:pPr/>
-              <a:t>1/31/2026</a:t>
+              <a:t>2/2/2026</a:t>
             </a:fld>
             <a:endParaRPr lang="en-US"/>
           </a:p>
@@ -2712,7 +2712,7 @@
             <a:fld id="{1D8BD707-D9CF-40AE-B4C6-C98DA3205C09}" type="datetimeFigureOut">
               <a:rPr lang="en-US" smtClean="0"/>
               <a:pPr/>
-              <a:t>1/31/2026</a:t>
+              <a:t>2/2/2026</a:t>
             </a:fld>
             <a:endParaRPr lang="en-US"/>
           </a:p>
@@ -3137,29 +3137,26 @@
         </p:nvSpPr>
         <p:spPr>
           <a:xfrm>
-            <a:off x="2040418" y="1001224"/>
-            <a:ext cx="14153488" cy="2183520"/>
+            <a:off x="2576168" y="1430890"/>
+            <a:ext cx="13135661" cy="769441"/>
           </a:xfrm>
           <a:prstGeom prst="rect">
             <a:avLst/>
           </a:prstGeom>
         </p:spPr>
         <p:txBody>
-          <a:bodyPr lIns="0" tIns="0" rIns="0" bIns="0" rtlCol="0" anchor="t">
+          <a:bodyPr wrap="square" lIns="0" tIns="0" rIns="0" bIns="0" rtlCol="0" anchor="t">
             <a:spAutoFit/>
           </a:bodyPr>
           <a:lstStyle/>
           <a:p>
             <a:pPr marL="0" lvl="0" indent="0" algn="ctr">
-              <a:lnSpc>
-                <a:spcPts val="15599"/>
-              </a:lnSpc>
               <a:spcBef>
                 <a:spcPct val="0"/>
               </a:spcBef>
             </a:pPr>
             <a:r>
-              <a:rPr lang="en-US" sz="11142" b="1">
+              <a:rPr lang="en-US" sz="5000" b="1" dirty="0">
                 <a:solidFill>
                   <a:srgbClr val="12229D"/>
                 </a:solidFill>
@@ -3168,7 +3165,7 @@
                 <a:cs typeface="Heading Now 31-38 Bold"/>
                 <a:sym typeface="Heading Now 31-38 Bold"/>
               </a:rPr>
-              <a:t>DEVSECOPS PIPELINE </a:t>
+              <a:t>DevSecOps Pipeline for AWS Infrastructure</a:t>
             </a:r>
           </a:p>
         </p:txBody>
@@ -3279,7 +3276,7 @@
               </a:spcBef>
             </a:pPr>
             <a:r>
-              <a:rPr lang="en-US" sz="5195" spc="1283">
+              <a:rPr lang="en-US" sz="5195" spc="1283" dirty="0">
                 <a:solidFill>
                   <a:srgbClr val="00004D"/>
                 </a:solidFill>
@@ -3323,7 +3320,7 @@
               </a:spcBef>
             </a:pPr>
             <a:r>
-              <a:rPr lang="en-US" sz="6061" b="1" u="none" strike="noStrike">
+              <a:rPr lang="en-US" sz="6061" b="1" u="none" strike="noStrike" dirty="0">
                 <a:solidFill>
                   <a:srgbClr val="00004D"/>
                 </a:solidFill>
@@ -3332,8 +3329,29 @@
                 <a:cs typeface="Heading Now 31-38 Bold"/>
                 <a:sym typeface="Heading Now 31-38 Bold"/>
               </a:rPr>
-              <a:t>Aryan Bamne</a:t>
-            </a:r>
+              <a:t>Aryan </a:t>
+            </a:r>
+            <a:r>
+              <a:rPr lang="en-US" sz="6061" b="1" u="none" strike="noStrike" dirty="0" err="1">
+                <a:solidFill>
+                  <a:srgbClr val="00004D"/>
+                </a:solidFill>
+                <a:latin typeface="Heading Now 31-38 Bold"/>
+                <a:ea typeface="Heading Now 31-38 Bold"/>
+                <a:cs typeface="Heading Now 31-38 Bold"/>
+                <a:sym typeface="Heading Now 31-38 Bold"/>
+              </a:rPr>
+              <a:t>Bamne</a:t>
+            </a:r>
+            <a:endParaRPr lang="en-US" sz="6061" b="1" u="none" strike="noStrike" dirty="0">
+              <a:solidFill>
+                <a:srgbClr val="00004D"/>
+              </a:solidFill>
+              <a:latin typeface="Heading Now 31-38 Bold"/>
+              <a:ea typeface="Heading Now 31-38 Bold"/>
+              <a:cs typeface="Heading Now 31-38 Bold"/>
+              <a:sym typeface="Heading Now 31-38 Bold"/>
+            </a:endParaRPr>
           </a:p>
           <a:p>
             <a:pPr marL="0" lvl="0" indent="0" algn="l">
@@ -3345,7 +3363,7 @@
               </a:spcBef>
             </a:pPr>
             <a:r>
-              <a:rPr lang="en-US" sz="6061" b="1" u="none" strike="noStrike">
+              <a:rPr lang="en-US" sz="6061" b="1" u="none" strike="noStrike" dirty="0">
                 <a:solidFill>
                   <a:srgbClr val="00004D"/>
                 </a:solidFill>
@@ -3367,7 +3385,7 @@
               </a:spcBef>
             </a:pPr>
             <a:r>
-              <a:rPr lang="en-US" sz="6061" b="1" u="none" strike="noStrike">
+              <a:rPr lang="en-US" sz="6061" b="1" u="none" strike="noStrike" dirty="0">
                 <a:solidFill>
                   <a:srgbClr val="00004D"/>
                 </a:solidFill>
@@ -3389,7 +3407,7 @@
               </a:spcBef>
             </a:pPr>
             <a:r>
-              <a:rPr lang="en-US" sz="6061" b="1" u="none" strike="noStrike">
+              <a:rPr lang="en-US" sz="6061" b="1" u="none" strike="noStrike" dirty="0">
                 <a:solidFill>
                   <a:srgbClr val="00004D"/>
                 </a:solidFill>
